--- a/week2/M8Prog laravel 02 - Nav en routes.pptx
+++ b/week2/M8Prog laravel 02 - Nav en routes.pptx
@@ -20,7 +20,8 @@
     <p:sldId id="285" r:id="rId14"/>
     <p:sldId id="283" r:id="rId15"/>
     <p:sldId id="286" r:id="rId16"/>
-    <p:sldId id="288" r:id="rId17"/>
+    <p:sldId id="289" r:id="rId17"/>
+    <p:sldId id="288" r:id="rId18"/>
   </p:sldIdLst>
   <p:sldSz cx="12192000" cy="6858000"/>
   <p:notesSz cx="6858000" cy="9144000"/>
@@ -130,7 +131,7 @@
 <file path=ppt/revisionInfo.xml><?xml version="1.0" encoding="utf-8"?>
 <p1510:revInfo xmlns:a="http://schemas.openxmlformats.org/drawingml/2006/main" xmlns:r="http://schemas.openxmlformats.org/officeDocument/2006/relationships" xmlns:p1510="http://schemas.microsoft.com/office/powerpoint/2015/10/main">
   <p1510:revLst>
-    <p1510:client id="{B0073C68-941D-4DCA-82B9-23A95BA68F2A}" v="6" dt="2026-04-20T14:23:35.806"/>
+    <p1510:client id="{B0073C68-941D-4DCA-82B9-23A95BA68F2A}" v="7" dt="2026-04-21T06:11:58.663"/>
   </p1510:revLst>
 </p1510:revInfo>
 </file>
@@ -140,7 +141,7 @@
   <pc:docChgLst>
     <pc:chgData name="Dragan Javorac" userId="913c2858-fb97-4c6e-a42c-b1f1a16b225e" providerId="ADAL" clId="{BC00D9DF-F858-4149-8B7B-F211D448CEDA}"/>
     <pc:docChg chg="undo custSel addSld delSld modSld sldOrd">
-      <pc:chgData name="Dragan Javorac" userId="913c2858-fb97-4c6e-a42c-b1f1a16b225e" providerId="ADAL" clId="{BC00D9DF-F858-4149-8B7B-F211D448CEDA}" dt="2026-04-20T14:29:35.315" v="2598" actId="1076"/>
+      <pc:chgData name="Dragan Javorac" userId="913c2858-fb97-4c6e-a42c-b1f1a16b225e" providerId="ADAL" clId="{BC00D9DF-F858-4149-8B7B-F211D448CEDA}" dt="2026-04-21T06:12:24.410" v="2659" actId="20577"/>
       <pc:docMkLst>
         <pc:docMk/>
       </pc:docMkLst>
@@ -236,6 +237,53 @@
           </ac:picMkLst>
         </pc:picChg>
       </pc:sldChg>
+      <pc:sldChg chg="addSp delSp modSp new mod">
+        <pc:chgData name="Dragan Javorac" userId="913c2858-fb97-4c6e-a42c-b1f1a16b225e" providerId="ADAL" clId="{BC00D9DF-F858-4149-8B7B-F211D448CEDA}" dt="2026-04-21T06:12:24.410" v="2659" actId="20577"/>
+        <pc:sldMkLst>
+          <pc:docMk/>
+          <pc:sldMk cId="1933563397" sldId="289"/>
+        </pc:sldMkLst>
+        <pc:spChg chg="mod">
+          <ac:chgData name="Dragan Javorac" userId="913c2858-fb97-4c6e-a42c-b1f1a16b225e" providerId="ADAL" clId="{BC00D9DF-F858-4149-8B7B-F211D448CEDA}" dt="2026-04-21T06:11:57.469" v="2630" actId="20577"/>
+          <ac:spMkLst>
+            <pc:docMk/>
+            <pc:sldMk cId="1933563397" sldId="289"/>
+            <ac:spMk id="2" creationId="{AF22CDA0-07E0-0C7A-C3C8-9B25355FD55D}"/>
+          </ac:spMkLst>
+        </pc:spChg>
+        <pc:spChg chg="del">
+          <ac:chgData name="Dragan Javorac" userId="913c2858-fb97-4c6e-a42c-b1f1a16b225e" providerId="ADAL" clId="{BC00D9DF-F858-4149-8B7B-F211D448CEDA}" dt="2026-04-21T06:11:58.663" v="2631"/>
+          <ac:spMkLst>
+            <pc:docMk/>
+            <pc:sldMk cId="1933563397" sldId="289"/>
+            <ac:spMk id="3" creationId="{83163373-6B48-F0BC-DFE2-86A5236ADF32}"/>
+          </ac:spMkLst>
+        </pc:spChg>
+        <pc:spChg chg="add mod">
+          <ac:chgData name="Dragan Javorac" userId="913c2858-fb97-4c6e-a42c-b1f1a16b225e" providerId="ADAL" clId="{BC00D9DF-F858-4149-8B7B-F211D448CEDA}" dt="2026-04-21T06:12:15.808" v="2641" actId="1076"/>
+          <ac:spMkLst>
+            <pc:docMk/>
+            <pc:sldMk cId="1933563397" sldId="289"/>
+            <ac:spMk id="5" creationId="{E90AFB7D-8FF8-7932-BED3-02E6D8373E1D}"/>
+          </ac:spMkLst>
+        </pc:spChg>
+        <pc:spChg chg="add mod">
+          <ac:chgData name="Dragan Javorac" userId="913c2858-fb97-4c6e-a42c-b1f1a16b225e" providerId="ADAL" clId="{BC00D9DF-F858-4149-8B7B-F211D448CEDA}" dt="2026-04-21T06:12:24.410" v="2659" actId="20577"/>
+          <ac:spMkLst>
+            <pc:docMk/>
+            <pc:sldMk cId="1933563397" sldId="289"/>
+            <ac:spMk id="6" creationId="{9ADED497-83AA-A774-2A44-793D4C4EA249}"/>
+          </ac:spMkLst>
+        </pc:spChg>
+        <pc:picChg chg="add mod">
+          <ac:chgData name="Dragan Javorac" userId="913c2858-fb97-4c6e-a42c-b1f1a16b225e" providerId="ADAL" clId="{BC00D9DF-F858-4149-8B7B-F211D448CEDA}" dt="2026-04-21T06:12:06.009" v="2638" actId="1076"/>
+          <ac:picMkLst>
+            <pc:docMk/>
+            <pc:sldMk cId="1933563397" sldId="289"/>
+            <ac:picMk id="4" creationId="{76B90127-EBF5-7BED-507B-92C187C26E23}"/>
+          </ac:picMkLst>
+        </pc:picChg>
+      </pc:sldChg>
     </pc:docChg>
   </pc:docChgLst>
 </pc:chgInfo>
@@ -390,7 +438,7 @@
           <a:p>
             <a:fld id="{AD36792F-A28E-4983-A7F5-F40ED51D6004}" type="datetimeFigureOut">
               <a:rPr lang="nl-NL" smtClean="0"/>
-              <a:t>20-4-2026</a:t>
+              <a:t>21-4-2026</a:t>
             </a:fld>
             <a:endParaRPr lang="nl-NL"/>
           </a:p>
@@ -590,7 +638,7 @@
           <a:p>
             <a:fld id="{AD36792F-A28E-4983-A7F5-F40ED51D6004}" type="datetimeFigureOut">
               <a:rPr lang="nl-NL" smtClean="0"/>
-              <a:t>20-4-2026</a:t>
+              <a:t>21-4-2026</a:t>
             </a:fld>
             <a:endParaRPr lang="nl-NL"/>
           </a:p>
@@ -800,7 +848,7 @@
           <a:p>
             <a:fld id="{AD36792F-A28E-4983-A7F5-F40ED51D6004}" type="datetimeFigureOut">
               <a:rPr lang="nl-NL" smtClean="0"/>
-              <a:t>20-4-2026</a:t>
+              <a:t>21-4-2026</a:t>
             </a:fld>
             <a:endParaRPr lang="nl-NL"/>
           </a:p>
@@ -1000,7 +1048,7 @@
           <a:p>
             <a:fld id="{AD36792F-A28E-4983-A7F5-F40ED51D6004}" type="datetimeFigureOut">
               <a:rPr lang="nl-NL" smtClean="0"/>
-              <a:t>20-4-2026</a:t>
+              <a:t>21-4-2026</a:t>
             </a:fld>
             <a:endParaRPr lang="nl-NL"/>
           </a:p>
@@ -1276,7 +1324,7 @@
           <a:p>
             <a:fld id="{AD36792F-A28E-4983-A7F5-F40ED51D6004}" type="datetimeFigureOut">
               <a:rPr lang="nl-NL" smtClean="0"/>
-              <a:t>20-4-2026</a:t>
+              <a:t>21-4-2026</a:t>
             </a:fld>
             <a:endParaRPr lang="nl-NL"/>
           </a:p>
@@ -1544,7 +1592,7 @@
           <a:p>
             <a:fld id="{AD36792F-A28E-4983-A7F5-F40ED51D6004}" type="datetimeFigureOut">
               <a:rPr lang="nl-NL" smtClean="0"/>
-              <a:t>20-4-2026</a:t>
+              <a:t>21-4-2026</a:t>
             </a:fld>
             <a:endParaRPr lang="nl-NL"/>
           </a:p>
@@ -1959,7 +2007,7 @@
           <a:p>
             <a:fld id="{AD36792F-A28E-4983-A7F5-F40ED51D6004}" type="datetimeFigureOut">
               <a:rPr lang="nl-NL" smtClean="0"/>
-              <a:t>20-4-2026</a:t>
+              <a:t>21-4-2026</a:t>
             </a:fld>
             <a:endParaRPr lang="nl-NL"/>
           </a:p>
@@ -2101,7 +2149,7 @@
           <a:p>
             <a:fld id="{AD36792F-A28E-4983-A7F5-F40ED51D6004}" type="datetimeFigureOut">
               <a:rPr lang="nl-NL" smtClean="0"/>
-              <a:t>20-4-2026</a:t>
+              <a:t>21-4-2026</a:t>
             </a:fld>
             <a:endParaRPr lang="nl-NL"/>
           </a:p>
@@ -2214,7 +2262,7 @@
           <a:p>
             <a:fld id="{AD36792F-A28E-4983-A7F5-F40ED51D6004}" type="datetimeFigureOut">
               <a:rPr lang="nl-NL" smtClean="0"/>
-              <a:t>20-4-2026</a:t>
+              <a:t>21-4-2026</a:t>
             </a:fld>
             <a:endParaRPr lang="nl-NL"/>
           </a:p>
@@ -2527,7 +2575,7 @@
           <a:p>
             <a:fld id="{AD36792F-A28E-4983-A7F5-F40ED51D6004}" type="datetimeFigureOut">
               <a:rPr lang="nl-NL" smtClean="0"/>
-              <a:t>20-4-2026</a:t>
+              <a:t>21-4-2026</a:t>
             </a:fld>
             <a:endParaRPr lang="nl-NL"/>
           </a:p>
@@ -2816,7 +2864,7 @@
           <a:p>
             <a:fld id="{AD36792F-A28E-4983-A7F5-F40ED51D6004}" type="datetimeFigureOut">
               <a:rPr lang="nl-NL" smtClean="0"/>
-              <a:t>20-4-2026</a:t>
+              <a:t>21-4-2026</a:t>
             </a:fld>
             <a:endParaRPr lang="nl-NL"/>
           </a:p>
@@ -3066,7 +3114,7 @@
           <a:p>
             <a:fld id="{AD36792F-A28E-4983-A7F5-F40ED51D6004}" type="datetimeFigureOut">
               <a:rPr lang="nl-NL" smtClean="0"/>
-              <a:t>20-4-2026</a:t>
+              <a:t>21-4-2026</a:t>
             </a:fld>
             <a:endParaRPr lang="nl-NL"/>
           </a:p>
@@ -4719,6 +4767,191 @@
 </file>
 
 <file path=ppt/slides/slide16.xml><?xml version="1.0" encoding="utf-8"?>
+<p:sld xmlns:a="http://schemas.openxmlformats.org/drawingml/2006/main" xmlns:r="http://schemas.openxmlformats.org/officeDocument/2006/relationships" xmlns:p="http://schemas.openxmlformats.org/presentationml/2006/main">
+  <p:cSld>
+    <p:spTree>
+      <p:nvGrpSpPr>
+        <p:cNvPr id="1" name=""/>
+        <p:cNvGrpSpPr/>
+        <p:nvPr/>
+      </p:nvGrpSpPr>
+      <p:grpSpPr>
+        <a:xfrm>
+          <a:off x="0" y="0"/>
+          <a:ext cx="0" cy="0"/>
+          <a:chOff x="0" y="0"/>
+          <a:chExt cx="0" cy="0"/>
+        </a:xfrm>
+      </p:grpSpPr>
+      <p:sp>
+        <p:nvSpPr>
+          <p:cNvPr id="2" name="Title 1">
+            <a:extLst>
+              <a:ext uri="{FF2B5EF4-FFF2-40B4-BE49-F238E27FC236}">
+                <a16:creationId xmlns:a16="http://schemas.microsoft.com/office/drawing/2014/main" id="{AF22CDA0-07E0-0C7A-C3C8-9B25355FD55D}"/>
+              </a:ext>
+            </a:extLst>
+          </p:cNvPr>
+          <p:cNvSpPr>
+            <a:spLocks noGrp="1"/>
+          </p:cNvSpPr>
+          <p:nvPr>
+            <p:ph type="title"/>
+          </p:nvPr>
+        </p:nvSpPr>
+        <p:spPr/>
+        <p:txBody>
+          <a:bodyPr/>
+          <a:lstStyle/>
+          <a:p>
+            <a:r>
+              <a:rPr lang="nl-NL" dirty="0"/>
+              <a:t>Allemaal GET en POST?</a:t>
+            </a:r>
+          </a:p>
+        </p:txBody>
+      </p:sp>
+      <p:pic>
+        <p:nvPicPr>
+          <p:cNvPr id="4" name="Content Placeholder 3">
+            <a:extLst>
+              <a:ext uri="{FF2B5EF4-FFF2-40B4-BE49-F238E27FC236}">
+                <a16:creationId xmlns:a16="http://schemas.microsoft.com/office/drawing/2014/main" id="{76B90127-EBF5-7BED-507B-92C187C26E23}"/>
+              </a:ext>
+            </a:extLst>
+          </p:cNvPr>
+          <p:cNvPicPr>
+            <a:picLocks noGrp="1" noChangeAspect="1"/>
+          </p:cNvPicPr>
+          <p:nvPr>
+            <p:ph idx="1"/>
+          </p:nvPr>
+        </p:nvPicPr>
+        <p:blipFill>
+          <a:blip r:embed="rId2"/>
+          <a:stretch>
+            <a:fillRect/>
+          </a:stretch>
+        </p:blipFill>
+        <p:spPr>
+          <a:xfrm>
+            <a:off x="535854" y="2153145"/>
+            <a:ext cx="11120292" cy="1565213"/>
+          </a:xfrm>
+          <a:prstGeom prst="rect">
+            <a:avLst/>
+          </a:prstGeom>
+        </p:spPr>
+      </p:pic>
+      <p:sp>
+        <p:nvSpPr>
+          <p:cNvPr id="5" name="Arrow: Down 4">
+            <a:extLst>
+              <a:ext uri="{FF2B5EF4-FFF2-40B4-BE49-F238E27FC236}">
+                <a16:creationId xmlns:a16="http://schemas.microsoft.com/office/drawing/2014/main" id="{E90AFB7D-8FF8-7932-BED3-02E6D8373E1D}"/>
+              </a:ext>
+            </a:extLst>
+          </p:cNvPr>
+          <p:cNvSpPr/>
+          <p:nvPr/>
+        </p:nvSpPr>
+        <p:spPr>
+          <a:xfrm flipV="1">
+            <a:off x="2053652" y="3476277"/>
+            <a:ext cx="704538" cy="1409075"/>
+          </a:xfrm>
+          <a:prstGeom prst="downArrow">
+            <a:avLst/>
+          </a:prstGeom>
+        </p:spPr>
+        <p:style>
+          <a:lnRef idx="2">
+            <a:schemeClr val="accent1">
+              <a:shade val="15000"/>
+            </a:schemeClr>
+          </a:lnRef>
+          <a:fillRef idx="1">
+            <a:schemeClr val="accent1"/>
+          </a:fillRef>
+          <a:effectRef idx="0">
+            <a:schemeClr val="accent1"/>
+          </a:effectRef>
+          <a:fontRef idx="minor">
+            <a:schemeClr val="lt1"/>
+          </a:fontRef>
+        </p:style>
+        <p:txBody>
+          <a:bodyPr rtlCol="0" anchor="ctr"/>
+          <a:lstStyle/>
+          <a:p>
+            <a:pPr algn="ctr"/>
+            <a:endParaRPr lang="nl-NL"/>
+          </a:p>
+        </p:txBody>
+      </p:sp>
+      <p:sp>
+        <p:nvSpPr>
+          <p:cNvPr id="6" name="Rectangle 5">
+            <a:extLst>
+              <a:ext uri="{FF2B5EF4-FFF2-40B4-BE49-F238E27FC236}">
+                <a16:creationId xmlns:a16="http://schemas.microsoft.com/office/drawing/2014/main" id="{9ADED497-83AA-A774-2A44-793D4C4EA249}"/>
+              </a:ext>
+            </a:extLst>
+          </p:cNvPr>
+          <p:cNvSpPr/>
+          <p:nvPr/>
+        </p:nvSpPr>
+        <p:spPr>
+          <a:xfrm>
+            <a:off x="1394085" y="5021705"/>
+            <a:ext cx="3028013" cy="1229193"/>
+          </a:xfrm>
+          <a:prstGeom prst="rect">
+            <a:avLst/>
+          </a:prstGeom>
+        </p:spPr>
+        <p:style>
+          <a:lnRef idx="2">
+            <a:schemeClr val="accent1">
+              <a:shade val="15000"/>
+            </a:schemeClr>
+          </a:lnRef>
+          <a:fillRef idx="1">
+            <a:schemeClr val="accent1"/>
+          </a:fillRef>
+          <a:effectRef idx="0">
+            <a:schemeClr val="accent1"/>
+          </a:effectRef>
+          <a:fontRef idx="minor">
+            <a:schemeClr val="lt1"/>
+          </a:fontRef>
+        </p:style>
+        <p:txBody>
+          <a:bodyPr rtlCol="0" anchor="ctr"/>
+          <a:lstStyle/>
+          <a:p>
+            <a:pPr algn="ctr"/>
+            <a:r>
+              <a:rPr lang="nl-NL"/>
+              <a:t>Verander dan dit</a:t>
+            </a:r>
+          </a:p>
+        </p:txBody>
+      </p:sp>
+    </p:spTree>
+    <p:extLst>
+      <p:ext uri="{BB962C8B-B14F-4D97-AF65-F5344CB8AC3E}">
+        <p14:creationId xmlns:p14="http://schemas.microsoft.com/office/powerpoint/2010/main" val="1933563397"/>
+      </p:ext>
+    </p:extLst>
+  </p:cSld>
+  <p:clrMapOvr>
+    <a:masterClrMapping/>
+  </p:clrMapOvr>
+</p:sld>
+</file>
+
+<file path=ppt/slides/slide17.xml><?xml version="1.0" encoding="utf-8"?>
 <p:sld xmlns:a="http://schemas.openxmlformats.org/drawingml/2006/main" xmlns:r="http://schemas.openxmlformats.org/officeDocument/2006/relationships" xmlns:p="http://schemas.openxmlformats.org/presentationml/2006/main">
   <p:cSld>
     <p:spTree>
